--- a/2. ORM/ORM.pptx
+++ b/2. ORM/ORM.pptx
@@ -121,6 +121,11 @@
       </a:defRPr>
     </a:lvl9pPr>
   </p:defaultTextStyle>
+  <p:extLst>
+    <p:ext uri="{EFAFB233-063F-42B5-8137-9DF3F51BA10A}">
+      <p15:sldGuideLst xmlns:p15="http://schemas.microsoft.com/office/powerpoint/2012/main"/>
+    </p:ext>
+  </p:extLst>
 </p:presentation>
 </file>
 
@@ -636,611 +641,6 @@
               </a:lnSpc>
               <a:buNone/>
             </a:pPr>
-            <a:r>
-              <a:rPr lang="en-US" sz="2000" b="0" u="none" strike="noStrike" dirty="0">
-                <a:solidFill>
-                  <a:srgbClr val="000000"/>
-                </a:solidFill>
-                <a:effectLst/>
-                <a:uFillTx/>
-                <a:latin typeface="Arial"/>
-              </a:rPr>
-              <a:t>Object-Relational Mapping, u ORM. La </a:t>
-            </a:r>
-            <a:r>
-              <a:rPr lang="en-US" sz="2000" b="0" u="none" strike="noStrike" dirty="0" err="1">
-                <a:solidFill>
-                  <a:srgbClr val="000000"/>
-                </a:solidFill>
-                <a:effectLst/>
-                <a:uFillTx/>
-                <a:latin typeface="Arial"/>
-              </a:rPr>
-              <a:t>pregunta</a:t>
-            </a:r>
-            <a:r>
-              <a:rPr lang="en-US" sz="2000" b="0" u="none" strike="noStrike" dirty="0">
-                <a:solidFill>
-                  <a:srgbClr val="000000"/>
-                </a:solidFill>
-                <a:effectLst/>
-                <a:uFillTx/>
-                <a:latin typeface="Arial"/>
-              </a:rPr>
-              <a:t> </a:t>
-            </a:r>
-            <a:r>
-              <a:rPr lang="en-US" sz="2000" b="0" u="none" strike="noStrike" dirty="0" err="1">
-                <a:solidFill>
-                  <a:srgbClr val="000000"/>
-                </a:solidFill>
-                <a:effectLst/>
-                <a:uFillTx/>
-                <a:latin typeface="Arial"/>
-              </a:rPr>
-              <a:t>que</a:t>
-            </a:r>
-            <a:r>
-              <a:rPr lang="en-US" sz="2000" b="0" u="none" strike="noStrike" dirty="0">
-                <a:solidFill>
-                  <a:srgbClr val="000000"/>
-                </a:solidFill>
-                <a:effectLst/>
-                <a:uFillTx/>
-                <a:latin typeface="Arial"/>
-              </a:rPr>
-              <a:t> </a:t>
-            </a:r>
-            <a:r>
-              <a:rPr lang="en-US" sz="2000" b="0" u="none" strike="noStrike" dirty="0" err="1">
-                <a:solidFill>
-                  <a:srgbClr val="000000"/>
-                </a:solidFill>
-                <a:effectLst/>
-                <a:uFillTx/>
-                <a:latin typeface="Arial"/>
-              </a:rPr>
-              <a:t>nos</a:t>
-            </a:r>
-            <a:r>
-              <a:rPr lang="en-US" sz="2000" b="0" u="none" strike="noStrike" dirty="0">
-                <a:solidFill>
-                  <a:srgbClr val="000000"/>
-                </a:solidFill>
-                <a:effectLst/>
-                <a:uFillTx/>
-                <a:latin typeface="Arial"/>
-              </a:rPr>
-              <a:t> </a:t>
-            </a:r>
-            <a:r>
-              <a:rPr lang="en-US" sz="2000" b="0" u="none" strike="noStrike" dirty="0" err="1">
-                <a:solidFill>
-                  <a:srgbClr val="000000"/>
-                </a:solidFill>
-                <a:effectLst/>
-                <a:uFillTx/>
-                <a:latin typeface="Arial"/>
-              </a:rPr>
-              <a:t>va</a:t>
-            </a:r>
-            <a:r>
-              <a:rPr lang="en-US" sz="2000" b="0" u="none" strike="noStrike" dirty="0">
-                <a:solidFill>
-                  <a:srgbClr val="000000"/>
-                </a:solidFill>
-                <a:effectLst/>
-                <a:uFillTx/>
-                <a:latin typeface="Arial"/>
-              </a:rPr>
-              <a:t> a </a:t>
-            </a:r>
-            <a:r>
-              <a:rPr lang="en-US" sz="2000" b="0" u="none" strike="noStrike" dirty="0" err="1">
-                <a:solidFill>
-                  <a:srgbClr val="000000"/>
-                </a:solidFill>
-                <a:effectLst/>
-                <a:uFillTx/>
-                <a:latin typeface="Arial"/>
-              </a:rPr>
-              <a:t>guiar</a:t>
-            </a:r>
-            <a:r>
-              <a:rPr lang="en-US" sz="2000" b="0" u="none" strike="noStrike" dirty="0">
-                <a:solidFill>
-                  <a:srgbClr val="000000"/>
-                </a:solidFill>
-                <a:effectLst/>
-                <a:uFillTx/>
-                <a:latin typeface="Arial"/>
-              </a:rPr>
-              <a:t> </a:t>
-            </a:r>
-            <a:r>
-              <a:rPr lang="en-US" sz="2000" b="0" u="none" strike="noStrike" dirty="0" err="1">
-                <a:solidFill>
-                  <a:srgbClr val="000000"/>
-                </a:solidFill>
-                <a:effectLst/>
-                <a:uFillTx/>
-                <a:latin typeface="Arial"/>
-              </a:rPr>
-              <a:t>toda</a:t>
-            </a:r>
-            <a:r>
-              <a:rPr lang="en-US" sz="2000" b="0" u="none" strike="noStrike" dirty="0">
-                <a:solidFill>
-                  <a:srgbClr val="000000"/>
-                </a:solidFill>
-                <a:effectLst/>
-                <a:uFillTx/>
-                <a:latin typeface="Arial"/>
-              </a:rPr>
-              <a:t> la </a:t>
-            </a:r>
-            <a:r>
-              <a:rPr lang="en-US" sz="2000" b="0" u="none" strike="noStrike" dirty="0" err="1">
-                <a:solidFill>
-                  <a:srgbClr val="000000"/>
-                </a:solidFill>
-                <a:effectLst/>
-                <a:uFillTx/>
-                <a:latin typeface="Arial"/>
-              </a:rPr>
-              <a:t>clase</a:t>
-            </a:r>
-            <a:r>
-              <a:rPr lang="en-US" sz="2000" b="0" u="none" strike="noStrike" dirty="0">
-                <a:solidFill>
-                  <a:srgbClr val="000000"/>
-                </a:solidFill>
-                <a:effectLst/>
-                <a:uFillTx/>
-                <a:latin typeface="Arial"/>
-              </a:rPr>
-              <a:t> es simple: </a:t>
-            </a:r>
-            <a:r>
-              <a:rPr lang="en-US" sz="2000" b="0" u="none" strike="noStrike" dirty="0" err="1">
-                <a:solidFill>
-                  <a:srgbClr val="000000"/>
-                </a:solidFill>
-                <a:effectLst/>
-                <a:uFillTx/>
-                <a:latin typeface="Arial"/>
-              </a:rPr>
-              <a:t>nuestro</a:t>
-            </a:r>
-            <a:r>
-              <a:rPr lang="en-US" sz="2000" b="0" u="none" strike="noStrike" dirty="0">
-                <a:solidFill>
-                  <a:srgbClr val="000000"/>
-                </a:solidFill>
-                <a:effectLst/>
-                <a:uFillTx/>
-                <a:latin typeface="Arial"/>
-              </a:rPr>
-              <a:t> </a:t>
-            </a:r>
-            <a:r>
-              <a:rPr lang="en-US" sz="2000" b="0" u="none" strike="noStrike" dirty="0" err="1">
-                <a:solidFill>
-                  <a:srgbClr val="000000"/>
-                </a:solidFill>
-                <a:effectLst/>
-                <a:uFillTx/>
-                <a:latin typeface="Arial"/>
-              </a:rPr>
-              <a:t>código</a:t>
-            </a:r>
-            <a:r>
-              <a:rPr lang="en-US" sz="2000" b="0" u="none" strike="noStrike" dirty="0">
-                <a:solidFill>
-                  <a:srgbClr val="000000"/>
-                </a:solidFill>
-                <a:effectLst/>
-                <a:uFillTx/>
-                <a:latin typeface="Arial"/>
-              </a:rPr>
-              <a:t> </a:t>
-            </a:r>
-            <a:r>
-              <a:rPr lang="en-US" sz="2000" b="0" u="none" strike="noStrike" dirty="0" err="1">
-                <a:solidFill>
-                  <a:srgbClr val="000000"/>
-                </a:solidFill>
-                <a:effectLst/>
-                <a:uFillTx/>
-                <a:latin typeface="Arial"/>
-              </a:rPr>
-              <a:t>está</a:t>
-            </a:r>
-            <a:r>
-              <a:rPr lang="en-US" sz="2000" b="0" u="none" strike="noStrike" dirty="0">
-                <a:solidFill>
-                  <a:srgbClr val="000000"/>
-                </a:solidFill>
-                <a:effectLst/>
-                <a:uFillTx/>
-                <a:latin typeface="Arial"/>
-              </a:rPr>
-              <a:t> </a:t>
-            </a:r>
-            <a:r>
-              <a:rPr lang="en-US" sz="2000" b="0" u="none" strike="noStrike" dirty="0" err="1">
-                <a:solidFill>
-                  <a:srgbClr val="000000"/>
-                </a:solidFill>
-                <a:effectLst/>
-                <a:uFillTx/>
-                <a:latin typeface="Arial"/>
-              </a:rPr>
-              <a:t>escrito</a:t>
-            </a:r>
-            <a:r>
-              <a:rPr lang="en-US" sz="2000" b="0" u="none" strike="noStrike" dirty="0">
-                <a:solidFill>
-                  <a:srgbClr val="000000"/>
-                </a:solidFill>
-                <a:effectLst/>
-                <a:uFillTx/>
-                <a:latin typeface="Arial"/>
-              </a:rPr>
-              <a:t> </a:t>
-            </a:r>
-            <a:r>
-              <a:rPr lang="en-US" sz="2000" b="0" u="none" strike="noStrike" dirty="0" err="1">
-                <a:solidFill>
-                  <a:srgbClr val="000000"/>
-                </a:solidFill>
-                <a:effectLst/>
-                <a:uFillTx/>
-                <a:latin typeface="Arial"/>
-              </a:rPr>
-              <a:t>en</a:t>
-            </a:r>
-            <a:r>
-              <a:rPr lang="en-US" sz="2000" b="0" u="none" strike="noStrike" dirty="0">
-                <a:solidFill>
-                  <a:srgbClr val="000000"/>
-                </a:solidFill>
-                <a:effectLst/>
-                <a:uFillTx/>
-                <a:latin typeface="Arial"/>
-              </a:rPr>
-              <a:t> </a:t>
-            </a:r>
-            <a:r>
-              <a:rPr lang="en-US" sz="2000" b="0" u="none" strike="noStrike" dirty="0" err="1">
-                <a:solidFill>
-                  <a:srgbClr val="000000"/>
-                </a:solidFill>
-                <a:effectLst/>
-                <a:uFillTx/>
-                <a:latin typeface="Arial"/>
-              </a:rPr>
-              <a:t>objetos</a:t>
-            </a:r>
-            <a:r>
-              <a:rPr lang="en-US" sz="2000" b="0" u="none" strike="noStrike" dirty="0">
-                <a:solidFill>
-                  <a:srgbClr val="000000"/>
-                </a:solidFill>
-                <a:effectLst/>
-                <a:uFillTx/>
-                <a:latin typeface="Arial"/>
-              </a:rPr>
-              <a:t>, </a:t>
-            </a:r>
-            <a:r>
-              <a:rPr lang="en-US" sz="2000" b="0" u="none" strike="noStrike" dirty="0" err="1">
-                <a:solidFill>
-                  <a:srgbClr val="000000"/>
-                </a:solidFill>
-                <a:effectLst/>
-                <a:uFillTx/>
-                <a:latin typeface="Arial"/>
-              </a:rPr>
-              <a:t>pero</a:t>
-            </a:r>
-            <a:r>
-              <a:rPr lang="en-US" sz="2000" b="0" u="none" strike="noStrike" dirty="0">
-                <a:solidFill>
-                  <a:srgbClr val="000000"/>
-                </a:solidFill>
-                <a:effectLst/>
-                <a:uFillTx/>
-                <a:latin typeface="Arial"/>
-              </a:rPr>
-              <a:t> la base de </a:t>
-            </a:r>
-            <a:r>
-              <a:rPr lang="en-US" sz="2000" b="0" u="none" strike="noStrike" dirty="0" err="1">
-                <a:solidFill>
-                  <a:srgbClr val="000000"/>
-                </a:solidFill>
-                <a:effectLst/>
-                <a:uFillTx/>
-                <a:latin typeface="Arial"/>
-              </a:rPr>
-              <a:t>datos</a:t>
-            </a:r>
-            <a:r>
-              <a:rPr lang="en-US" sz="2000" b="0" u="none" strike="noStrike" dirty="0">
-                <a:solidFill>
-                  <a:srgbClr val="000000"/>
-                </a:solidFill>
-                <a:effectLst/>
-                <a:uFillTx/>
-                <a:latin typeface="Arial"/>
-              </a:rPr>
-              <a:t> </a:t>
-            </a:r>
-            <a:r>
-              <a:rPr lang="en-US" sz="2000" b="0" u="none" strike="noStrike" dirty="0" err="1">
-                <a:solidFill>
-                  <a:srgbClr val="000000"/>
-                </a:solidFill>
-                <a:effectLst/>
-                <a:uFillTx/>
-                <a:latin typeface="Arial"/>
-              </a:rPr>
-              <a:t>guarda</a:t>
-            </a:r>
-            <a:r>
-              <a:rPr lang="en-US" sz="2000" b="0" u="none" strike="noStrike" dirty="0">
-                <a:solidFill>
-                  <a:srgbClr val="000000"/>
-                </a:solidFill>
-                <a:effectLst/>
-                <a:uFillTx/>
-                <a:latin typeface="Arial"/>
-              </a:rPr>
-              <a:t> </a:t>
-            </a:r>
-            <a:r>
-              <a:rPr lang="en-US" sz="2000" b="0" u="none" strike="noStrike" dirty="0" err="1">
-                <a:solidFill>
-                  <a:srgbClr val="000000"/>
-                </a:solidFill>
-                <a:effectLst/>
-                <a:uFillTx/>
-                <a:latin typeface="Arial"/>
-              </a:rPr>
-              <a:t>todo</a:t>
-            </a:r>
-            <a:r>
-              <a:rPr lang="en-US" sz="2000" b="0" u="none" strike="noStrike" dirty="0">
-                <a:solidFill>
-                  <a:srgbClr val="000000"/>
-                </a:solidFill>
-                <a:effectLst/>
-                <a:uFillTx/>
-                <a:latin typeface="Arial"/>
-              </a:rPr>
-              <a:t> </a:t>
-            </a:r>
-            <a:r>
-              <a:rPr lang="en-US" sz="2000" b="0" u="none" strike="noStrike" dirty="0" err="1">
-                <a:solidFill>
-                  <a:srgbClr val="000000"/>
-                </a:solidFill>
-                <a:effectLst/>
-                <a:uFillTx/>
-                <a:latin typeface="Arial"/>
-              </a:rPr>
-              <a:t>en</a:t>
-            </a:r>
-            <a:r>
-              <a:rPr lang="en-US" sz="2000" b="0" u="none" strike="noStrike" dirty="0">
-                <a:solidFill>
-                  <a:srgbClr val="000000"/>
-                </a:solidFill>
-                <a:effectLst/>
-                <a:uFillTx/>
-                <a:latin typeface="Arial"/>
-              </a:rPr>
-              <a:t> </a:t>
-            </a:r>
-            <a:r>
-              <a:rPr lang="en-US" sz="2000" b="0" u="none" strike="noStrike" dirty="0" err="1">
-                <a:solidFill>
-                  <a:srgbClr val="000000"/>
-                </a:solidFill>
-                <a:effectLst/>
-                <a:uFillTx/>
-                <a:latin typeface="Arial"/>
-              </a:rPr>
-              <a:t>tablas</a:t>
-            </a:r>
-            <a:r>
-              <a:rPr lang="en-US" sz="2000" b="0" u="none" strike="noStrike" dirty="0">
-                <a:solidFill>
-                  <a:srgbClr val="000000"/>
-                </a:solidFill>
-                <a:effectLst/>
-                <a:uFillTx/>
-                <a:latin typeface="Arial"/>
-              </a:rPr>
-              <a:t>. ¿</a:t>
-            </a:r>
-            <a:r>
-              <a:rPr lang="en-US" sz="2000" b="0" u="none" strike="noStrike" dirty="0" err="1">
-                <a:solidFill>
-                  <a:srgbClr val="000000"/>
-                </a:solidFill>
-                <a:effectLst/>
-                <a:uFillTx/>
-                <a:latin typeface="Arial"/>
-              </a:rPr>
-              <a:t>Cómo</a:t>
-            </a:r>
-            <a:r>
-              <a:rPr lang="en-US" sz="2000" b="0" u="none" strike="noStrike" dirty="0">
-                <a:solidFill>
-                  <a:srgbClr val="000000"/>
-                </a:solidFill>
-                <a:effectLst/>
-                <a:uFillTx/>
-                <a:latin typeface="Arial"/>
-              </a:rPr>
-              <a:t> se </a:t>
-            </a:r>
-            <a:r>
-              <a:rPr lang="en-US" sz="2000" b="0" u="none" strike="noStrike" dirty="0" err="1">
-                <a:solidFill>
-                  <a:srgbClr val="000000"/>
-                </a:solidFill>
-                <a:effectLst/>
-                <a:uFillTx/>
-                <a:latin typeface="Arial"/>
-              </a:rPr>
-              <a:t>comunican</a:t>
-            </a:r>
-            <a:r>
-              <a:rPr lang="en-US" sz="2000" b="0" u="none" strike="noStrike" dirty="0">
-                <a:solidFill>
-                  <a:srgbClr val="000000"/>
-                </a:solidFill>
-                <a:effectLst/>
-                <a:uFillTx/>
-                <a:latin typeface="Arial"/>
-              </a:rPr>
-              <a:t> </a:t>
-            </a:r>
-            <a:r>
-              <a:rPr lang="en-US" sz="2000" b="0" u="none" strike="noStrike" dirty="0" err="1">
-                <a:solidFill>
-                  <a:srgbClr val="000000"/>
-                </a:solidFill>
-                <a:effectLst/>
-                <a:uFillTx/>
-                <a:latin typeface="Arial"/>
-              </a:rPr>
-              <a:t>esos</a:t>
-            </a:r>
-            <a:r>
-              <a:rPr lang="en-US" sz="2000" b="0" u="none" strike="noStrike" dirty="0">
-                <a:solidFill>
-                  <a:srgbClr val="000000"/>
-                </a:solidFill>
-                <a:effectLst/>
-                <a:uFillTx/>
-                <a:latin typeface="Arial"/>
-              </a:rPr>
-              <a:t> dos </a:t>
-            </a:r>
-            <a:r>
-              <a:rPr lang="en-US" sz="2000" b="0" u="none" strike="noStrike" dirty="0" err="1">
-                <a:solidFill>
-                  <a:srgbClr val="000000"/>
-                </a:solidFill>
-                <a:effectLst/>
-                <a:uFillTx/>
-                <a:latin typeface="Arial"/>
-              </a:rPr>
-              <a:t>mundos</a:t>
-            </a:r>
-            <a:r>
-              <a:rPr lang="en-US" sz="2000" b="0" u="none" strike="noStrike" dirty="0">
-                <a:solidFill>
-                  <a:srgbClr val="000000"/>
-                </a:solidFill>
-                <a:effectLst/>
-                <a:uFillTx/>
-                <a:latin typeface="Arial"/>
-              </a:rPr>
-              <a:t>? Eso es </a:t>
-            </a:r>
-            <a:r>
-              <a:rPr lang="en-US" sz="2000" b="0" u="none" strike="noStrike" dirty="0" err="1">
-                <a:solidFill>
-                  <a:srgbClr val="000000"/>
-                </a:solidFill>
-                <a:effectLst/>
-                <a:uFillTx/>
-                <a:latin typeface="Arial"/>
-              </a:rPr>
-              <a:t>exactamente</a:t>
-            </a:r>
-            <a:r>
-              <a:rPr lang="en-US" sz="2000" b="0" u="none" strike="noStrike" dirty="0">
-                <a:solidFill>
-                  <a:srgbClr val="000000"/>
-                </a:solidFill>
-                <a:effectLst/>
-                <a:uFillTx/>
-                <a:latin typeface="Arial"/>
-              </a:rPr>
-              <a:t> lo </a:t>
-            </a:r>
-            <a:r>
-              <a:rPr lang="en-US" sz="2000" b="0" u="none" strike="noStrike" dirty="0" err="1">
-                <a:solidFill>
-                  <a:srgbClr val="000000"/>
-                </a:solidFill>
-                <a:effectLst/>
-                <a:uFillTx/>
-                <a:latin typeface="Arial"/>
-              </a:rPr>
-              <a:t>que</a:t>
-            </a:r>
-            <a:r>
-              <a:rPr lang="en-US" sz="2000" b="0" u="none" strike="noStrike" dirty="0">
-                <a:solidFill>
-                  <a:srgbClr val="000000"/>
-                </a:solidFill>
-                <a:effectLst/>
-                <a:uFillTx/>
-                <a:latin typeface="Arial"/>
-              </a:rPr>
-              <a:t> </a:t>
-            </a:r>
-            <a:r>
-              <a:rPr lang="en-US" sz="2000" b="0" u="none" strike="noStrike" dirty="0" err="1">
-                <a:solidFill>
-                  <a:srgbClr val="000000"/>
-                </a:solidFill>
-                <a:effectLst/>
-                <a:uFillTx/>
-                <a:latin typeface="Arial"/>
-              </a:rPr>
-              <a:t>vamos</a:t>
-            </a:r>
-            <a:r>
-              <a:rPr lang="en-US" sz="2000" b="0" u="none" strike="noStrike" dirty="0">
-                <a:solidFill>
-                  <a:srgbClr val="000000"/>
-                </a:solidFill>
-                <a:effectLst/>
-                <a:uFillTx/>
-                <a:latin typeface="Arial"/>
-              </a:rPr>
-              <a:t> a </a:t>
-            </a:r>
-            <a:r>
-              <a:rPr lang="en-US" sz="2000" b="0" u="none" strike="noStrike" dirty="0" err="1">
-                <a:solidFill>
-                  <a:srgbClr val="000000"/>
-                </a:solidFill>
-                <a:effectLst/>
-                <a:uFillTx/>
-                <a:latin typeface="Arial"/>
-              </a:rPr>
-              <a:t>desarmar</a:t>
-            </a:r>
-            <a:r>
-              <a:rPr lang="en-US" sz="2000" b="0" u="none" strike="noStrike" dirty="0">
-                <a:solidFill>
-                  <a:srgbClr val="000000"/>
-                </a:solidFill>
-                <a:effectLst/>
-                <a:uFillTx/>
-                <a:latin typeface="Arial"/>
-              </a:rPr>
-              <a:t> hoy.</a:t>
-            </a:r>
             <a:endParaRPr lang="es-AR" sz="2000" b="0" u="none" strike="noStrike" dirty="0">
               <a:solidFill>
                 <a:srgbClr val="000000"/>
@@ -1409,18 +809,7 @@
               </a:lnSpc>
               <a:buNone/>
             </a:pPr>
-            <a:r>
-              <a:rPr lang="en-US" sz="2000" b="0" u="none" strike="noStrike">
-                <a:solidFill>
-                  <a:srgbClr val="000000"/>
-                </a:solidFill>
-                <a:effectLst/>
-                <a:uFillTx/>
-                <a:latin typeface="Arial"/>
-              </a:rPr>
-              <a:t>Entity Framework, o EF Core, es el ORM oficial de Microsoft para .NET, y vale la pena verlo en detalle porque combina varios conceptos que ya vimos. Sigue el patrón Data Mapper: el DbContext representa la sesión activa con la base, y cada DbSet&lt;T&gt; expone una tabla como una colección de objetos que se puede consultar con LINQ, es decir, con sintaxis nativa de C#, sin escribir SQL. Soporta tanto Code First como Database First, tiene su propio sistema de migraciones con los comandos dotnet ef, y funciona con distintos proveedores: SQL Server, PostgreSQL, SQLite, MySQL, entre otros. En el ejemplo de la derecha ven un DbContext con un DbSet de Usuario, y una consulta LINQ que filtra por edad y ordena por nombre — eso se traduce automáticamente en el SQL equivalente.</a:t>
-            </a:r>
-            <a:endParaRPr lang="es-AR" sz="2000" b="0" u="none" strike="noStrike">
+            <a:endParaRPr lang="es-AR" sz="2000" b="0" u="none" strike="noStrike" dirty="0">
               <a:solidFill>
                 <a:srgbClr val="000000"/>
               </a:solidFill>
@@ -1588,18 +977,7 @@
               </a:lnSpc>
               <a:buNone/>
             </a:pPr>
-            <a:r>
-              <a:rPr lang="en-US" sz="2000" b="0" u="none" strike="noStrike">
-                <a:solidFill>
-                  <a:srgbClr val="000000"/>
-                </a:solidFill>
-                <a:effectLst/>
-                <a:uFillTx/>
-                <a:latin typeface="Arial"/>
-              </a:rPr>
-              <a:t>A la izquierda, SQL puro con un JOIN entre usuarios y pedidos. A la derecha, la misma consulta con el ORM en Python, encadenando métodos. Es importante remarcar: el ORM no reemplaza el SQL, lo genera. Por debajo, esa cadena de métodos se traduce en algo muy similar a lo que tenemos a la izquierda.</a:t>
-            </a:r>
-            <a:endParaRPr lang="es-AR" sz="2000" b="0" u="none" strike="noStrike">
+            <a:endParaRPr lang="es-AR" sz="2000" b="0" u="none" strike="noStrike" dirty="0">
               <a:solidFill>
                 <a:srgbClr val="000000"/>
               </a:solidFill>
@@ -1767,18 +1145,7 @@
               </a:lnSpc>
               <a:buNone/>
             </a:pPr>
-            <a:r>
-              <a:rPr lang="en-US" sz="2000" b="0" u="none" strike="noStrike">
-                <a:solidFill>
-                  <a:srgbClr val="000000"/>
-                </a:solidFill>
-                <a:effectLst/>
-                <a:uFillTx/>
-                <a:latin typeface="Arial"/>
-              </a:rPr>
-              <a:t>Probablemente el error de rendimiento más común al trabajar con un ORM. Pido todos los autores con una consulta, y dentro de un for accedo a los libros de cada autor: cada acceso dispara una consulta nueva. Con 50 autores, son 51 consultas en vez de una. La solución es el eager loading: pedirle al ORM que traiga todo en una sola consulta con JOIN. Casi todos los ORMs lo ofrecen, con distintos nombres.</a:t>
-            </a:r>
-            <a:endParaRPr lang="es-AR" sz="2000" b="0" u="none" strike="noStrike">
+            <a:endParaRPr lang="es-AR" sz="2000" b="0" u="none" strike="noStrike" dirty="0">
               <a:solidFill>
                 <a:srgbClr val="000000"/>
               </a:solidFill>
@@ -1946,18 +1313,7 @@
               </a:lnSpc>
               <a:buNone/>
             </a:pPr>
-            <a:r>
-              <a:rPr lang="en-US" sz="2000" b="0" u="none" strike="noStrike">
-                <a:solidFill>
-                  <a:srgbClr val="000000"/>
-                </a:solidFill>
-                <a:effectLst/>
-                <a:uFillTx/>
-                <a:latin typeface="Arial"/>
-              </a:rPr>
-              <a:t>Un ORM no solo lee y escribe datos, también ayuda a evolucionar el esquema de forma controlada. Cambiamos el modelo en el código, la herramienta genera un archivo de migración que describe ese cambio, y ese mismo script se aplica en cada entorno para que todos terminen con el mismo esquema. Alembic, Django Migrations, Flyway o Prisma Migrate hacen exactamente esto.</a:t>
-            </a:r>
-            <a:endParaRPr lang="es-AR" sz="2000" b="0" u="none" strike="noStrike">
+            <a:endParaRPr lang="es-AR" sz="2000" b="0" u="none" strike="noStrike" dirty="0">
               <a:solidFill>
                 <a:srgbClr val="000000"/>
               </a:solidFill>
@@ -2125,18 +1481,7 @@
               </a:lnSpc>
               <a:buNone/>
             </a:pPr>
-            <a:r>
-              <a:rPr lang="en-US" sz="2000" b="0" u="none" strike="noStrike">
-                <a:solidFill>
-                  <a:srgbClr val="000000"/>
-                </a:solidFill>
-                <a:effectLst/>
-                <a:uFillTx/>
-                <a:latin typeface="Arial"/>
-              </a:rPr>
-              <a:t>¿Siempre conviene usar un ORM? No. Es una gran opción para CRUD estándar, prototipado rápido, equipos con niveles de SQL heterogéneos, y portabilidad entre motores. Conviene usarlo con cautela en reportes analíticos pesados, consultas de rendimiento crítico, migraciones de datos muy específicas, o procesamiento batch sobre millones de filas.</a:t>
-            </a:r>
-            <a:endParaRPr lang="es-AR" sz="2000" b="0" u="none" strike="noStrike">
+            <a:endParaRPr lang="es-AR" sz="2000" b="0" u="none" strike="noStrike" dirty="0">
               <a:solidFill>
                 <a:srgbClr val="000000"/>
               </a:solidFill>
@@ -2304,18 +1649,7 @@
               </a:lnSpc>
               <a:buNone/>
             </a:pPr>
-            <a:r>
-              <a:rPr lang="en-US" sz="2000" b="0" u="none" strike="noStrike">
-                <a:solidFill>
-                  <a:srgbClr val="000000"/>
-                </a:solidFill>
-                <a:effectLst/>
-                <a:uFillTx/>
-                <a:latin typeface="Arial"/>
-              </a:rPr>
-              <a:t>Cinco ideas para llevarse: un ORM traduce entre objetos y tablas; ahorra tiempo pero no reemplaza entender SQL; Active Record es simple, Data Mapper separa mejor responsabilidades; cuidado con el problema N+1; y las migraciones son tan parte del trabajo con un ORM como las consultas mismas. Con esto cerramos la teoría, abramos la ronda de preguntas.</a:t>
-            </a:r>
-            <a:endParaRPr lang="es-AR" sz="2000" b="0" u="none" strike="noStrike">
+            <a:endParaRPr lang="es-AR" sz="2000" b="0" u="none" strike="noStrike" dirty="0">
               <a:solidFill>
                 <a:srgbClr val="000000"/>
               </a:solidFill>
@@ -2483,18 +1817,7 @@
               </a:lnSpc>
               <a:buNone/>
             </a:pPr>
-            <a:r>
-              <a:rPr lang="en-US" sz="2000" b="0" u="none" strike="noStrike">
-                <a:solidFill>
-                  <a:srgbClr val="000000"/>
-                </a:solidFill>
-                <a:effectLst/>
-                <a:uFillTx/>
-                <a:latin typeface="Arial"/>
-              </a:rPr>
-              <a:t>Antes de hablar de la solución, entendamos el problema. Cuando programamos orientado a objetos, pensamos en herencia, referencias entre objetos, colecciones anidadas. Una base relacional no entiende nada de eso: solo tablas planas, filas, columnas y claves foráneas. A este choque de paradigmas se lo conoce como 'impedance mismatch'. Cada vez que guardamos o leemos un objeto, alguien tiene que traducir entre estos dos mundos.</a:t>
-            </a:r>
-            <a:endParaRPr lang="es-AR" sz="2000" b="0" u="none" strike="noStrike">
+            <a:endParaRPr lang="es-AR" sz="2000" b="0" u="none" strike="noStrike" dirty="0">
               <a:solidFill>
                 <a:srgbClr val="000000"/>
               </a:solidFill>
@@ -2662,18 +1985,7 @@
               </a:lnSpc>
               <a:buNone/>
             </a:pPr>
-            <a:r>
-              <a:rPr lang="en-US" sz="2000" b="0" u="none" strike="noStrike">
-                <a:solidFill>
-                  <a:srgbClr val="000000"/>
-                </a:solidFill>
-                <a:effectLst/>
-                <a:uFillTx/>
-                <a:latin typeface="Arial"/>
-              </a:rPr>
-              <a:t>Un ORM es la herramienta que automatiza esa traducción. En la práctica se traduce en cuatro equivalencias: una clase se corresponde con una tabla, un atributo con una columna, una instancia con una fila, y una referencia entre objetos con una clave foránea. Si se quedan con estas cuatro líneas, ya tienen el ochenta por ciento del concepto.</a:t>
-            </a:r>
-            <a:endParaRPr lang="es-AR" sz="2000" b="0" u="none" strike="noStrike">
+            <a:endParaRPr lang="es-AR" sz="2000" b="0" u="none" strike="noStrike" dirty="0">
               <a:solidFill>
                 <a:srgbClr val="000000"/>
               </a:solidFill>
@@ -2841,18 +2153,7 @@
               </a:lnSpc>
               <a:buNone/>
             </a:pPr>
-            <a:r>
-              <a:rPr lang="en-US" sz="2000" b="0" u="none" strike="noStrike">
-                <a:solidFill>
-                  <a:srgbClr val="000000"/>
-                </a:solidFill>
-                <a:effectLst/>
-                <a:uFillTx/>
-                <a:latin typeface="Arial"/>
-              </a:rPr>
-              <a:t>A la izquierda tenemos una clase Usuario, con sus atributos típicos. A la derecha, la tabla usuarios en la base de datos, con esas mismas columnas. El ORM está en el medio: cuando creo una instancia de Usuario, sabe convertirla en un INSERT; cuando consulto usuarios, sabe convertir las filas devueltas en objetos Usuario que puedo usar normalmente en mi programa.</a:t>
-            </a:r>
-            <a:endParaRPr lang="es-AR" sz="2000" b="0" u="none" strike="noStrike">
+            <a:endParaRPr lang="es-AR" sz="2000" b="0" u="none" strike="noStrike" dirty="0">
               <a:solidFill>
                 <a:srgbClr val="000000"/>
               </a:solidFill>
@@ -3020,18 +2321,7 @@
               </a:lnSpc>
               <a:buNone/>
             </a:pPr>
-            <a:r>
-              <a:rPr lang="en-US" sz="2000" b="0" u="none" strike="noStrike">
-                <a:solidFill>
-                  <a:srgbClr val="000000"/>
-                </a:solidFill>
-                <a:effectLst/>
-                <a:uFillTx/>
-                <a:latin typeface="Arial"/>
-              </a:rPr>
-              <a:t>Primero, productividad: menos SQL repetitivo. Segundo, portabilidad entre motores de base de datos con cambios mínimos. Tercero, seguridad: consultas parametrizadas que reducen el riesgo de inyección SQL. También suman mantenibilidad, porque el modelo convive con la lógica del dominio, y manejo de migraciones, que vamos a ver más adelante.</a:t>
-            </a:r>
-            <a:endParaRPr lang="es-AR" sz="2000" b="0" u="none" strike="noStrike">
+            <a:endParaRPr lang="es-AR" sz="2000" b="0" u="none" strike="noStrike" dirty="0">
               <a:solidFill>
                 <a:srgbClr val="000000"/>
               </a:solidFill>
@@ -3199,18 +2489,7 @@
               </a:lnSpc>
               <a:buNone/>
             </a:pPr>
-            <a:r>
-              <a:rPr lang="en-US" sz="2000" b="0" u="none" strike="noStrike">
-                <a:solidFill>
-                  <a:srgbClr val="000000"/>
-                </a:solidFill>
-                <a:effectLst/>
-                <a:uFillTx/>
-                <a:latin typeface="Arial"/>
-              </a:rPr>
-              <a:t>Ningún ORM es gratis. Tiene una curva de aprendizaje real. Puede meter overhead de rendimiento comparado con SQL optimizado a mano. Las consultas complejas son incómodas de expresar. Y es una 'abstracción con fugas': tarde o temprano van a necesitar entender el SQL real para debuggear. El problema más común de todos, que vamos a ver en detalle, es el N+1.</a:t>
-            </a:r>
-            <a:endParaRPr lang="es-AR" sz="2000" b="0" u="none" strike="noStrike">
+            <a:endParaRPr lang="es-AR" sz="2000" b="0" u="none" strike="noStrike" dirty="0">
               <a:solidFill>
                 <a:srgbClr val="000000"/>
               </a:solidFill>
@@ -3378,18 +2657,7 @@
               </a:lnSpc>
               <a:buNone/>
             </a:pPr>
-            <a:r>
-              <a:rPr lang="en-US" sz="2000" b="0" u="none" strike="noStrike">
-                <a:solidFill>
-                  <a:srgbClr val="000000"/>
-                </a:solidFill>
-                <a:effectLst/>
-                <a:uFillTx/>
-                <a:latin typeface="Arial"/>
-              </a:rPr>
-              <a:t>Active Record es el enfoque donde el propio objeto sabe cómo persistirse: usuario.save(). Lo usan Rails, Django o Laravel. Es simple, pero mezcla lógica de negocio con persistencia. Data Mapper separa completamente esas responsabilidades: una capa aparte se encarga de guardar el objeto. SQLAlchemy y Hibernate son los ejemplos clásicos. Da objetos más puros, a cambio de una capa extra de complejidad.</a:t>
-            </a:r>
-            <a:endParaRPr lang="es-AR" sz="2000" b="0" u="none" strike="noStrike">
+            <a:endParaRPr lang="es-AR" sz="2000" b="0" u="none" strike="noStrike" dirty="0">
               <a:solidFill>
                 <a:srgbClr val="000000"/>
               </a:solidFill>
@@ -3557,18 +2825,7 @@
               </a:lnSpc>
               <a:buNone/>
             </a:pPr>
-            <a:r>
-              <a:rPr lang="en-US" sz="2000" b="0" u="none" strike="noStrike">
-                <a:solidFill>
-                  <a:srgbClr val="000000"/>
-                </a:solidFill>
-                <a:effectLst/>
-                <a:uFillTx/>
-                <a:latin typeface="Arial"/>
-              </a:rPr>
-              <a:t>Prácticamente todos los ecosistemas tienen su propio ORM: SQLAlchemy y Django ORM en Python, Hibernate y JPA en Java/Kotlin, Entity Framework Core en .NET, Prisma/TypeORM/Sequelize en JavaScript y TypeScript, Active Record en Ruby on Rails, Eloquent o Doctrine en PHP. La idea de fondo es siempre la misma; lo que cambia es la sintaxis.</a:t>
-            </a:r>
-            <a:endParaRPr lang="es-AR" sz="2000" b="0" u="none" strike="noStrike">
+            <a:endParaRPr lang="es-AR" sz="2000" b="0" u="none" strike="noStrike" dirty="0">
               <a:solidFill>
                 <a:srgbClr val="000000"/>
               </a:solidFill>
@@ -3736,18 +2993,7 @@
               </a:lnSpc>
               <a:buNone/>
             </a:pPr>
-            <a:r>
-              <a:rPr lang="en-US" sz="2000" b="0" u="none" strike="noStrike">
-                <a:solidFill>
-                  <a:srgbClr val="000000"/>
-                </a:solidFill>
-                <a:effectLst/>
-                <a:uFillTx/>
-                <a:latin typeface="Arial"/>
-              </a:rPr>
-              <a:t>Más allá del ORM que elijan, hay una decisión previa: ¿de dónde parte el modelo? Con Code First, escriben las clases en su lenguaje y el ORM genera el esquema de base de datos por ustedes, versionando los cambios con migraciones — ideal para proyectos nuevos. Con Database First, parten de una base ya existente y el ORM hace 'scaffolding': inspecciona las tablas y genera las clases automáticamente — típico en bases legacy, compartidas entre equipos, o administradas por un DBA. Ninguno es mejor en abstracto, depende de dónde arranca el proyecto.</a:t>
-            </a:r>
-            <a:endParaRPr lang="es-AR" sz="2000" b="0" u="none" strike="noStrike">
+            <a:endParaRPr lang="es-AR" sz="2000" b="0" u="none" strike="noStrike" dirty="0">
               <a:solidFill>
                 <a:srgbClr val="000000"/>
               </a:solidFill>

--- a/2. ORM/ORM.pptx
+++ b/2. ORM/ORM.pptx
@@ -6432,7 +6432,7 @@
               </a:tabLst>
             </a:pPr>
             <a:r>
-              <a:rPr lang="en-US" sz="1300" b="0" u="none" strike="noStrike">
+              <a:rPr lang="en-US" sz="1300" b="0" u="none" strike="noStrike" dirty="0">
                 <a:solidFill>
                   <a:srgbClr val="8FC7E8"/>
                 </a:solidFill>
@@ -6441,9 +6441,45 @@
                 <a:latin typeface="Courier New"/>
                 <a:ea typeface="Courier New"/>
               </a:rPr>
-              <a:t>SELECT u.nombre, u.email</a:t>
-            </a:r>
-            <a:endParaRPr lang="es-AR" sz="1300" b="0" u="none" strike="noStrike">
+              <a:t>SELECT </a:t>
+            </a:r>
+            <a:r>
+              <a:rPr lang="en-US" sz="1300" b="0" u="none" strike="noStrike" dirty="0" err="1">
+                <a:solidFill>
+                  <a:srgbClr val="8FC7E8"/>
+                </a:solidFill>
+                <a:effectLst/>
+                <a:uFillTx/>
+                <a:latin typeface="Courier New"/>
+                <a:ea typeface="Courier New"/>
+              </a:rPr>
+              <a:t>u.nombre</a:t>
+            </a:r>
+            <a:r>
+              <a:rPr lang="en-US" sz="1300" b="0" u="none" strike="noStrike" dirty="0">
+                <a:solidFill>
+                  <a:srgbClr val="8FC7E8"/>
+                </a:solidFill>
+                <a:effectLst/>
+                <a:uFillTx/>
+                <a:latin typeface="Courier New"/>
+                <a:ea typeface="Courier New"/>
+              </a:rPr>
+              <a:t>, </a:t>
+            </a:r>
+            <a:r>
+              <a:rPr lang="en-US" sz="1300" b="0" u="none" strike="noStrike" dirty="0" err="1">
+                <a:solidFill>
+                  <a:srgbClr val="8FC7E8"/>
+                </a:solidFill>
+                <a:effectLst/>
+                <a:uFillTx/>
+                <a:latin typeface="Courier New"/>
+                <a:ea typeface="Courier New"/>
+              </a:rPr>
+              <a:t>u.email</a:t>
+            </a:r>
+            <a:endParaRPr lang="es-AR" sz="1300" b="0" u="none" strike="noStrike" dirty="0">
               <a:solidFill>
                 <a:srgbClr val="000000"/>
               </a:solidFill>
@@ -6500,7 +6536,7 @@
               </a:tabLst>
             </a:pPr>
             <a:r>
-              <a:rPr lang="en-US" sz="1300" b="0" u="none" strike="noStrike">
+              <a:rPr lang="en-US" sz="1300" b="0" u="none" strike="noStrike" dirty="0">
                 <a:solidFill>
                   <a:srgbClr val="8FC7E8"/>
                 </a:solidFill>
@@ -6509,9 +6545,33 @@
                 <a:latin typeface="Courier New"/>
                 <a:ea typeface="Courier New"/>
               </a:rPr>
-              <a:t>FROM usuarios u</a:t>
-            </a:r>
-            <a:endParaRPr lang="es-AR" sz="1300" b="0" u="none" strike="noStrike">
+              <a:t>FROM </a:t>
+            </a:r>
+            <a:r>
+              <a:rPr lang="en-US" sz="1300" b="0" u="none" strike="noStrike" dirty="0" err="1">
+                <a:solidFill>
+                  <a:srgbClr val="8FC7E8"/>
+                </a:solidFill>
+                <a:effectLst/>
+                <a:uFillTx/>
+                <a:latin typeface="Courier New"/>
+                <a:ea typeface="Courier New"/>
+              </a:rPr>
+              <a:t>usuarios</a:t>
+            </a:r>
+            <a:r>
+              <a:rPr lang="en-US" sz="1300" b="0" u="none" strike="noStrike" dirty="0">
+                <a:solidFill>
+                  <a:srgbClr val="8FC7E8"/>
+                </a:solidFill>
+                <a:effectLst/>
+                <a:uFillTx/>
+                <a:latin typeface="Courier New"/>
+                <a:ea typeface="Courier New"/>
+              </a:rPr>
+              <a:t> u</a:t>
+            </a:r>
+            <a:endParaRPr lang="es-AR" sz="1300" b="0" u="none" strike="noStrike" dirty="0">
               <a:solidFill>
                 <a:srgbClr val="000000"/>
               </a:solidFill>
@@ -6568,7 +6628,7 @@
               </a:tabLst>
             </a:pPr>
             <a:r>
-              <a:rPr lang="en-US" sz="1300" b="0" u="none" strike="noStrike">
+              <a:rPr lang="en-US" sz="1300" b="0" u="none" strike="noStrike" dirty="0">
                 <a:solidFill>
                   <a:srgbClr val="8FC7E8"/>
                 </a:solidFill>
@@ -6577,9 +6637,33 @@
                 <a:latin typeface="Courier New"/>
                 <a:ea typeface="Courier New"/>
               </a:rPr>
-              <a:t>JOIN pedidos p</a:t>
-            </a:r>
-            <a:endParaRPr lang="es-AR" sz="1300" b="0" u="none" strike="noStrike">
+              <a:t>JOIN </a:t>
+            </a:r>
+            <a:r>
+              <a:rPr lang="en-US" sz="1300" b="0" u="none" strike="noStrike" dirty="0" err="1">
+                <a:solidFill>
+                  <a:srgbClr val="8FC7E8"/>
+                </a:solidFill>
+                <a:effectLst/>
+                <a:uFillTx/>
+                <a:latin typeface="Courier New"/>
+                <a:ea typeface="Courier New"/>
+              </a:rPr>
+              <a:t>pedidos</a:t>
+            </a:r>
+            <a:r>
+              <a:rPr lang="en-US" sz="1300" b="0" u="none" strike="noStrike" dirty="0">
+                <a:solidFill>
+                  <a:srgbClr val="8FC7E8"/>
+                </a:solidFill>
+                <a:effectLst/>
+                <a:uFillTx/>
+                <a:latin typeface="Courier New"/>
+                <a:ea typeface="Courier New"/>
+              </a:rPr>
+              <a:t> p</a:t>
+            </a:r>
+            <a:endParaRPr lang="es-AR" sz="1300" b="0" u="none" strike="noStrike" dirty="0">
               <a:solidFill>
                 <a:srgbClr val="000000"/>
               </a:solidFill>
@@ -6636,7 +6720,7 @@
               </a:tabLst>
             </a:pPr>
             <a:r>
-              <a:rPr lang="en-US" sz="1300" b="0" u="none" strike="noStrike">
+              <a:rPr lang="en-US" sz="1300" b="0" u="none" strike="noStrike" dirty="0">
                 <a:solidFill>
                   <a:srgbClr val="8FC7E8"/>
                 </a:solidFill>
@@ -6645,9 +6729,33 @@
                 <a:latin typeface="Courier New"/>
                 <a:ea typeface="Courier New"/>
               </a:rPr>
-              <a:t>  ON p.usuario_id = u.id</a:t>
-            </a:r>
-            <a:endParaRPr lang="es-AR" sz="1300" b="0" u="none" strike="noStrike">
+              <a:t>  ON </a:t>
+            </a:r>
+            <a:r>
+              <a:rPr lang="en-US" sz="1300" b="0" u="none" strike="noStrike" dirty="0" err="1">
+                <a:solidFill>
+                  <a:srgbClr val="8FC7E8"/>
+                </a:solidFill>
+                <a:effectLst/>
+                <a:uFillTx/>
+                <a:latin typeface="Courier New"/>
+                <a:ea typeface="Courier New"/>
+              </a:rPr>
+              <a:t>p.usuario_id</a:t>
+            </a:r>
+            <a:r>
+              <a:rPr lang="en-US" sz="1300" b="0" u="none" strike="noStrike" dirty="0">
+                <a:solidFill>
+                  <a:srgbClr val="8FC7E8"/>
+                </a:solidFill>
+                <a:effectLst/>
+                <a:uFillTx/>
+                <a:latin typeface="Courier New"/>
+                <a:ea typeface="Courier New"/>
+              </a:rPr>
+              <a:t> = u.id</a:t>
+            </a:r>
+            <a:endParaRPr lang="es-AR" sz="1300" b="0" u="none" strike="noStrike" dirty="0">
               <a:solidFill>
                 <a:srgbClr val="000000"/>
               </a:solidFill>
@@ -6704,7 +6812,7 @@
               </a:tabLst>
             </a:pPr>
             <a:r>
-              <a:rPr lang="en-US" sz="1300" b="0" u="none" strike="noStrike">
+              <a:rPr lang="en-US" sz="1300" b="0" u="none" strike="noStrike" dirty="0">
                 <a:solidFill>
                   <a:srgbClr val="8FC7E8"/>
                 </a:solidFill>
@@ -6713,9 +6821,33 @@
                 <a:latin typeface="Courier New"/>
                 <a:ea typeface="Courier New"/>
               </a:rPr>
-              <a:t>WHERE p.total &gt; 100</a:t>
-            </a:r>
-            <a:endParaRPr lang="es-AR" sz="1300" b="0" u="none" strike="noStrike">
+              <a:t>WHERE </a:t>
+            </a:r>
+            <a:r>
+              <a:rPr lang="en-US" sz="1300" b="0" u="none" strike="noStrike" dirty="0" err="1">
+                <a:solidFill>
+                  <a:srgbClr val="8FC7E8"/>
+                </a:solidFill>
+                <a:effectLst/>
+                <a:uFillTx/>
+                <a:latin typeface="Courier New"/>
+                <a:ea typeface="Courier New"/>
+              </a:rPr>
+              <a:t>p.total</a:t>
+            </a:r>
+            <a:r>
+              <a:rPr lang="en-US" sz="1300" b="0" u="none" strike="noStrike" dirty="0">
+                <a:solidFill>
+                  <a:srgbClr val="8FC7E8"/>
+                </a:solidFill>
+                <a:effectLst/>
+                <a:uFillTx/>
+                <a:latin typeface="Courier New"/>
+                <a:ea typeface="Courier New"/>
+              </a:rPr>
+              <a:t> &gt; 100</a:t>
+            </a:r>
+            <a:endParaRPr lang="es-AR" sz="1300" b="0" u="none" strike="noStrike" dirty="0">
               <a:solidFill>
                 <a:srgbClr val="000000"/>
               </a:solidFill>
@@ -6772,7 +6904,7 @@
               </a:tabLst>
             </a:pPr>
             <a:r>
-              <a:rPr lang="en-US" sz="1300" b="0" u="none" strike="noStrike">
+              <a:rPr lang="en-US" sz="1300" b="0" u="none" strike="noStrike" dirty="0">
                 <a:solidFill>
                   <a:srgbClr val="8FC7E8"/>
                 </a:solidFill>
@@ -6781,9 +6913,33 @@
                 <a:latin typeface="Courier New"/>
                 <a:ea typeface="Courier New"/>
               </a:rPr>
-              <a:t>ORDER BY u.nombre;</a:t>
-            </a:r>
-            <a:endParaRPr lang="es-AR" sz="1300" b="0" u="none" strike="noStrike">
+              <a:t>ORDER BY </a:t>
+            </a:r>
+            <a:r>
+              <a:rPr lang="en-US" sz="1300" b="0" u="none" strike="noStrike" dirty="0" err="1">
+                <a:solidFill>
+                  <a:srgbClr val="8FC7E8"/>
+                </a:solidFill>
+                <a:effectLst/>
+                <a:uFillTx/>
+                <a:latin typeface="Courier New"/>
+                <a:ea typeface="Courier New"/>
+              </a:rPr>
+              <a:t>u.nombre</a:t>
+            </a:r>
+            <a:r>
+              <a:rPr lang="en-US" sz="1300" b="0" u="none" strike="noStrike" dirty="0">
+                <a:solidFill>
+                  <a:srgbClr val="8FC7E8"/>
+                </a:solidFill>
+                <a:effectLst/>
+                <a:uFillTx/>
+                <a:latin typeface="Courier New"/>
+                <a:ea typeface="Courier New"/>
+              </a:rPr>
+              <a:t>;</a:t>
+            </a:r>
+            <a:endParaRPr lang="es-AR" sz="1300" b="0" u="none" strike="noStrike" dirty="0">
               <a:solidFill>
                 <a:srgbClr val="000000"/>
               </a:solidFill>
@@ -6892,7 +7048,7 @@
               </a:tabLst>
             </a:pPr>
             <a:r>
-              <a:rPr lang="en-US" sz="1300" b="1" u="none" strike="noStrike">
+              <a:rPr lang="en-US" sz="1300" b="1" u="none" strike="noStrike" dirty="0">
                 <a:solidFill>
                   <a:srgbClr val="8FA3C9"/>
                 </a:solidFill>
@@ -6901,29 +7057,29 @@
                 <a:latin typeface="Calibri"/>
                 <a:ea typeface="Calibri"/>
               </a:rPr>
-              <a:t>Con un ORM (Python)</a:t>
-            </a:r>
-            <a:endParaRPr lang="es-AR" sz="1300" b="0" u="none" strike="noStrike">
-              <a:solidFill>
-                <a:srgbClr val="000000"/>
-              </a:solidFill>
-              <a:effectLst/>
-              <a:uFillTx/>
-              <a:latin typeface="Arial"/>
-            </a:endParaRPr>
-          </a:p>
-        </p:txBody>
-      </p:sp>
-      <p:sp>
-        <p:nvSpPr>
-          <p:cNvPr id="281" name="Text 12"/>
-          <p:cNvSpPr/>
-          <p:nvPr/>
-        </p:nvSpPr>
-        <p:spPr>
-          <a:xfrm>
-            <a:off x="6537960" y="2514600"/>
-            <a:ext cx="4800240" cy="365400"/>
+              <a:t>Con un ORM (LINQ)</a:t>
+            </a:r>
+            <a:endParaRPr lang="es-AR" sz="1300" b="0" u="none" strike="noStrike" dirty="0">
+              <a:solidFill>
+                <a:srgbClr val="000000"/>
+              </a:solidFill>
+              <a:effectLst/>
+              <a:uFillTx/>
+              <a:latin typeface="Arial"/>
+            </a:endParaRPr>
+          </a:p>
+        </p:txBody>
+      </p:sp>
+      <p:sp>
+        <p:nvSpPr>
+          <p:cNvPr id="286" name="Text 17"/>
+          <p:cNvSpPr/>
+          <p:nvPr/>
+        </p:nvSpPr>
+        <p:spPr>
+          <a:xfrm>
+            <a:off x="6464374" y="3282840"/>
+            <a:ext cx="5727626" cy="365400"/>
           </a:xfrm>
           <a:prstGeom prst="rect">
             <a:avLst/>
@@ -6960,7 +7116,7 @@
               </a:tabLst>
             </a:pPr>
             <a:r>
-              <a:rPr lang="en-US" sz="1300" b="0" u="none" strike="noStrike">
+              <a:rPr lang="en-US" sz="1300" b="0" u="none" strike="noStrike" dirty="0" err="1">
                 <a:solidFill>
                   <a:srgbClr val="8FD694"/>
                 </a:solidFill>
@@ -6969,55 +7125,21 @@
                 <a:latin typeface="Courier New"/>
                 <a:ea typeface="Courier New"/>
               </a:rPr>
-              <a:t>session.query(Usuario)</a:t>
-            </a:r>
-            <a:endParaRPr lang="es-AR" sz="1300" b="0" u="none" strike="noStrike">
-              <a:solidFill>
-                <a:srgbClr val="000000"/>
-              </a:solidFill>
-              <a:effectLst/>
-              <a:uFillTx/>
-              <a:latin typeface="Arial"/>
-            </a:endParaRPr>
-          </a:p>
-        </p:txBody>
-      </p:sp>
-      <p:sp>
-        <p:nvSpPr>
-          <p:cNvPr id="282" name="Text 13"/>
-          <p:cNvSpPr/>
-          <p:nvPr/>
-        </p:nvSpPr>
-        <p:spPr>
-          <a:xfrm>
-            <a:off x="6537960" y="2898720"/>
-            <a:ext cx="4800240" cy="365400"/>
-          </a:xfrm>
-          <a:prstGeom prst="rect">
-            <a:avLst/>
-          </a:prstGeom>
-          <a:noFill/>
-          <a:ln w="0">
-            <a:noFill/>
-          </a:ln>
-        </p:spPr>
-        <p:style>
-          <a:lnRef idx="0">
-            <a:scrgbClr r="0" g="0" b="0"/>
-          </a:lnRef>
-          <a:fillRef idx="0">
-            <a:scrgbClr r="0" g="0" b="0"/>
-          </a:fillRef>
-          <a:effectRef idx="0">
-            <a:scrgbClr r="0" g="0" b="0"/>
-          </a:effectRef>
-          <a:fontRef idx="minor"/>
-        </p:style>
-        <p:txBody>
-          <a:bodyPr lIns="0" tIns="0" rIns="0" bIns="0" anchor="ctr">
-            <a:noAutofit/>
-          </a:bodyPr>
-          <a:lstStyle/>
+              <a:t>context.Usuarios</a:t>
+            </a:r>
+            <a:r>
+              <a:rPr lang="en-US" sz="1300" b="0" u="none" strike="noStrike" dirty="0">
+                <a:solidFill>
+                  <a:srgbClr val="8FD694"/>
+                </a:solidFill>
+                <a:effectLst/>
+                <a:uFillTx/>
+                <a:latin typeface="Courier New"/>
+                <a:ea typeface="Courier New"/>
+              </a:rPr>
+              <a:t>    </a:t>
+            </a:r>
+          </a:p>
           <a:p>
             <a:pPr defTabSz="914400">
               <a:lnSpc>
@@ -7028,64 +7150,124 @@
               </a:tabLst>
             </a:pPr>
             <a:r>
-              <a:rPr lang="en-US" sz="1300" b="0" u="none" strike="noStrike">
+              <a:rPr lang="en-US" sz="1300" dirty="0">
                 <a:solidFill>
                   <a:srgbClr val="8FD694"/>
                 </a:solidFill>
-                <a:effectLst/>
-                <a:uFillTx/>
                 <a:latin typeface="Courier New"/>
                 <a:ea typeface="Courier New"/>
               </a:rPr>
-              <a:t>  .join(Pedido)</a:t>
-            </a:r>
-            <a:endParaRPr lang="es-AR" sz="1300" b="0" u="none" strike="noStrike">
-              <a:solidFill>
-                <a:srgbClr val="000000"/>
-              </a:solidFill>
-              <a:effectLst/>
-              <a:uFillTx/>
-              <a:latin typeface="Arial"/>
-            </a:endParaRPr>
-          </a:p>
-        </p:txBody>
-      </p:sp>
-      <p:sp>
-        <p:nvSpPr>
-          <p:cNvPr id="283" name="Text 14"/>
-          <p:cNvSpPr/>
-          <p:nvPr/>
-        </p:nvSpPr>
-        <p:spPr>
-          <a:xfrm>
-            <a:off x="6537960" y="3282840"/>
-            <a:ext cx="4800240" cy="365400"/>
-          </a:xfrm>
-          <a:prstGeom prst="rect">
-            <a:avLst/>
-          </a:prstGeom>
-          <a:noFill/>
-          <a:ln w="0">
-            <a:noFill/>
-          </a:ln>
-        </p:spPr>
-        <p:style>
-          <a:lnRef idx="0">
-            <a:scrgbClr r="0" g="0" b="0"/>
-          </a:lnRef>
-          <a:fillRef idx="0">
-            <a:scrgbClr r="0" g="0" b="0"/>
-          </a:fillRef>
-          <a:effectRef idx="0">
-            <a:scrgbClr r="0" g="0" b="0"/>
-          </a:effectRef>
-          <a:fontRef idx="minor"/>
-        </p:style>
-        <p:txBody>
-          <a:bodyPr lIns="0" tIns="0" rIns="0" bIns="0" anchor="ctr">
-            <a:noAutofit/>
-          </a:bodyPr>
-          <a:lstStyle/>
+              <a:t>    </a:t>
+            </a:r>
+            <a:r>
+              <a:rPr lang="en-US" sz="1300" b="0" u="none" strike="noStrike" dirty="0">
+                <a:solidFill>
+                  <a:srgbClr val="8FD694"/>
+                </a:solidFill>
+                <a:effectLst/>
+                <a:uFillTx/>
+                <a:latin typeface="Courier New"/>
+                <a:ea typeface="Courier New"/>
+              </a:rPr>
+              <a:t>.Where(u =&gt; </a:t>
+            </a:r>
+            <a:r>
+              <a:rPr lang="en-US" sz="1300" b="0" u="none" strike="noStrike" dirty="0" err="1">
+                <a:solidFill>
+                  <a:srgbClr val="8FD694"/>
+                </a:solidFill>
+                <a:effectLst/>
+                <a:uFillTx/>
+                <a:latin typeface="Courier New"/>
+                <a:ea typeface="Courier New"/>
+              </a:rPr>
+              <a:t>u.Pedidos.Any</a:t>
+            </a:r>
+            <a:r>
+              <a:rPr lang="en-US" sz="1300" b="0" u="none" strike="noStrike" dirty="0">
+                <a:solidFill>
+                  <a:srgbClr val="8FD694"/>
+                </a:solidFill>
+                <a:effectLst/>
+                <a:uFillTx/>
+                <a:latin typeface="Courier New"/>
+                <a:ea typeface="Courier New"/>
+              </a:rPr>
+              <a:t>(p =&gt; </a:t>
+            </a:r>
+            <a:r>
+              <a:rPr lang="en-US" sz="1300" b="0" u="none" strike="noStrike" dirty="0" err="1">
+                <a:solidFill>
+                  <a:srgbClr val="8FD694"/>
+                </a:solidFill>
+                <a:effectLst/>
+                <a:uFillTx/>
+                <a:latin typeface="Courier New"/>
+                <a:ea typeface="Courier New"/>
+              </a:rPr>
+              <a:t>p.Total</a:t>
+            </a:r>
+            <a:r>
+              <a:rPr lang="en-US" sz="1300" b="0" u="none" strike="noStrike" dirty="0">
+                <a:solidFill>
+                  <a:srgbClr val="8FD694"/>
+                </a:solidFill>
+                <a:effectLst/>
+                <a:uFillTx/>
+                <a:latin typeface="Courier New"/>
+                <a:ea typeface="Courier New"/>
+              </a:rPr>
+              <a:t> &gt; 100))      	    .</a:t>
+            </a:r>
+            <a:r>
+              <a:rPr lang="en-US" sz="1300" b="0" u="none" strike="noStrike" dirty="0" err="1">
+                <a:solidFill>
+                  <a:srgbClr val="8FD694"/>
+                </a:solidFill>
+                <a:effectLst/>
+                <a:uFillTx/>
+                <a:latin typeface="Courier New"/>
+                <a:ea typeface="Courier New"/>
+              </a:rPr>
+              <a:t>OrderBy</a:t>
+            </a:r>
+            <a:r>
+              <a:rPr lang="en-US" sz="1300" b="0" u="none" strike="noStrike" dirty="0">
+                <a:solidFill>
+                  <a:srgbClr val="8FD694"/>
+                </a:solidFill>
+                <a:effectLst/>
+                <a:uFillTx/>
+                <a:latin typeface="Courier New"/>
+                <a:ea typeface="Courier New"/>
+              </a:rPr>
+              <a:t>(u =&gt; </a:t>
+            </a:r>
+            <a:r>
+              <a:rPr lang="en-US" sz="1300" b="0" u="none" strike="noStrike" dirty="0" err="1">
+                <a:solidFill>
+                  <a:srgbClr val="8FD694"/>
+                </a:solidFill>
+                <a:effectLst/>
+                <a:uFillTx/>
+                <a:latin typeface="Courier New"/>
+                <a:ea typeface="Courier New"/>
+              </a:rPr>
+              <a:t>u.Nombre</a:t>
+            </a:r>
+            <a:r>
+              <a:rPr lang="en-US" sz="1300" b="0" u="none" strike="noStrike" dirty="0">
+                <a:solidFill>
+                  <a:srgbClr val="8FD694"/>
+                </a:solidFill>
+                <a:effectLst/>
+                <a:uFillTx/>
+                <a:latin typeface="Courier New"/>
+                <a:ea typeface="Courier New"/>
+              </a:rPr>
+              <a:t>)    </a:t>
+            </a:r>
+          </a:p>
           <a:p>
             <a:pPr defTabSz="914400">
               <a:lnSpc>
@@ -7096,75 +7278,17 @@
               </a:tabLst>
             </a:pPr>
             <a:r>
-              <a:rPr lang="en-US" sz="1300" b="0" u="none" strike="noStrike">
+              <a:rPr lang="en-US" sz="1300" dirty="0">
                 <a:solidFill>
                   <a:srgbClr val="8FD694"/>
                 </a:solidFill>
-                <a:effectLst/>
-                <a:uFillTx/>
                 <a:latin typeface="Courier New"/>
                 <a:ea typeface="Courier New"/>
               </a:rPr>
-              <a:t>  .filter(</a:t>
-            </a:r>
-            <a:endParaRPr lang="es-AR" sz="1300" b="0" u="none" strike="noStrike">
-              <a:solidFill>
-                <a:srgbClr val="000000"/>
-              </a:solidFill>
-              <a:effectLst/>
-              <a:uFillTx/>
-              <a:latin typeface="Arial"/>
-            </a:endParaRPr>
-          </a:p>
-        </p:txBody>
-      </p:sp>
-      <p:sp>
-        <p:nvSpPr>
-          <p:cNvPr id="284" name="Text 15"/>
-          <p:cNvSpPr/>
-          <p:nvPr/>
-        </p:nvSpPr>
-        <p:spPr>
-          <a:xfrm>
-            <a:off x="6537960" y="3666600"/>
-            <a:ext cx="4800240" cy="365400"/>
-          </a:xfrm>
-          <a:prstGeom prst="rect">
-            <a:avLst/>
-          </a:prstGeom>
-          <a:noFill/>
-          <a:ln w="0">
-            <a:noFill/>
-          </a:ln>
-        </p:spPr>
-        <p:style>
-          <a:lnRef idx="0">
-            <a:scrgbClr r="0" g="0" b="0"/>
-          </a:lnRef>
-          <a:fillRef idx="0">
-            <a:scrgbClr r="0" g="0" b="0"/>
-          </a:fillRef>
-          <a:effectRef idx="0">
-            <a:scrgbClr r="0" g="0" b="0"/>
-          </a:effectRef>
-          <a:fontRef idx="minor"/>
-        </p:style>
-        <p:txBody>
-          <a:bodyPr lIns="0" tIns="0" rIns="0" bIns="0" anchor="ctr">
-            <a:noAutofit/>
-          </a:bodyPr>
-          <a:lstStyle/>
-          <a:p>
-            <a:pPr defTabSz="914400">
-              <a:lnSpc>
-                <a:spcPct val="100000"/>
-              </a:lnSpc>
-              <a:tabLst>
-                <a:tab pos="0" algn="l"/>
-              </a:tabLst>
-            </a:pPr>
-            <a:r>
-              <a:rPr lang="en-US" sz="1300" b="0" u="none" strike="noStrike">
+              <a:t>    </a:t>
+            </a:r>
+            <a:r>
+              <a:rPr lang="en-US" sz="1300" b="0" u="none" strike="noStrike" dirty="0">
                 <a:solidFill>
                   <a:srgbClr val="8FD694"/>
                 </a:solidFill>
@@ -7173,66 +7297,10 @@
                 <a:latin typeface="Courier New"/>
                 <a:ea typeface="Courier New"/>
               </a:rPr>
-              <a:t>     Pedido.total &gt; 100)</a:t>
-            </a:r>
-            <a:endParaRPr lang="es-AR" sz="1300" b="0" u="none" strike="noStrike">
-              <a:solidFill>
-                <a:srgbClr val="000000"/>
-              </a:solidFill>
-              <a:effectLst/>
-              <a:uFillTx/>
-              <a:latin typeface="Arial"/>
-            </a:endParaRPr>
-          </a:p>
-        </p:txBody>
-      </p:sp>
-      <p:sp>
-        <p:nvSpPr>
-          <p:cNvPr id="285" name="Text 16"/>
-          <p:cNvSpPr/>
-          <p:nvPr/>
-        </p:nvSpPr>
-        <p:spPr>
-          <a:xfrm>
-            <a:off x="6537960" y="4050720"/>
-            <a:ext cx="4800240" cy="365400"/>
-          </a:xfrm>
-          <a:prstGeom prst="rect">
-            <a:avLst/>
-          </a:prstGeom>
-          <a:noFill/>
-          <a:ln w="0">
-            <a:noFill/>
-          </a:ln>
-        </p:spPr>
-        <p:style>
-          <a:lnRef idx="0">
-            <a:scrgbClr r="0" g="0" b="0"/>
-          </a:lnRef>
-          <a:fillRef idx="0">
-            <a:scrgbClr r="0" g="0" b="0"/>
-          </a:fillRef>
-          <a:effectRef idx="0">
-            <a:scrgbClr r="0" g="0" b="0"/>
-          </a:effectRef>
-          <a:fontRef idx="minor"/>
-        </p:style>
-        <p:txBody>
-          <a:bodyPr lIns="0" tIns="0" rIns="0" bIns="0" anchor="ctr">
-            <a:noAutofit/>
-          </a:bodyPr>
-          <a:lstStyle/>
-          <a:p>
-            <a:pPr defTabSz="914400">
-              <a:lnSpc>
-                <a:spcPct val="100000"/>
-              </a:lnSpc>
-              <a:tabLst>
-                <a:tab pos="0" algn="l"/>
-              </a:tabLst>
-            </a:pPr>
-            <a:r>
-              <a:rPr lang="en-US" sz="1300" b="0" u="none" strike="noStrike">
+              <a:t>.</a:t>
+            </a:r>
+            <a:r>
+              <a:rPr lang="en-US" sz="1300" b="0" u="none" strike="noStrike" dirty="0" err="1">
                 <a:solidFill>
                   <a:srgbClr val="8FD694"/>
                 </a:solidFill>
@@ -7241,66 +7309,10 @@
                 <a:latin typeface="Courier New"/>
                 <a:ea typeface="Courier New"/>
               </a:rPr>
-              <a:t>  .order_by(Usuario.nombre)</a:t>
-            </a:r>
-            <a:endParaRPr lang="es-AR" sz="1300" b="0" u="none" strike="noStrike">
-              <a:solidFill>
-                <a:srgbClr val="000000"/>
-              </a:solidFill>
-              <a:effectLst/>
-              <a:uFillTx/>
-              <a:latin typeface="Arial"/>
-            </a:endParaRPr>
-          </a:p>
-        </p:txBody>
-      </p:sp>
-      <p:sp>
-        <p:nvSpPr>
-          <p:cNvPr id="286" name="Text 17"/>
-          <p:cNvSpPr/>
-          <p:nvPr/>
-        </p:nvSpPr>
-        <p:spPr>
-          <a:xfrm>
-            <a:off x="6537960" y="4434840"/>
-            <a:ext cx="4800240" cy="365400"/>
-          </a:xfrm>
-          <a:prstGeom prst="rect">
-            <a:avLst/>
-          </a:prstGeom>
-          <a:noFill/>
-          <a:ln w="0">
-            <a:noFill/>
-          </a:ln>
-        </p:spPr>
-        <p:style>
-          <a:lnRef idx="0">
-            <a:scrgbClr r="0" g="0" b="0"/>
-          </a:lnRef>
-          <a:fillRef idx="0">
-            <a:scrgbClr r="0" g="0" b="0"/>
-          </a:fillRef>
-          <a:effectRef idx="0">
-            <a:scrgbClr r="0" g="0" b="0"/>
-          </a:effectRef>
-          <a:fontRef idx="minor"/>
-        </p:style>
-        <p:txBody>
-          <a:bodyPr lIns="0" tIns="0" rIns="0" bIns="0" anchor="ctr">
-            <a:noAutofit/>
-          </a:bodyPr>
-          <a:lstStyle/>
-          <a:p>
-            <a:pPr defTabSz="914400">
-              <a:lnSpc>
-                <a:spcPct val="100000"/>
-              </a:lnSpc>
-              <a:tabLst>
-                <a:tab pos="0" algn="l"/>
-              </a:tabLst>
-            </a:pPr>
-            <a:r>
-              <a:rPr lang="en-US" sz="1300" b="0" u="none" strike="noStrike">
+              <a:t>ToList</a:t>
+            </a:r>
+            <a:r>
+              <a:rPr lang="en-US" sz="1300" b="0" u="none" strike="noStrike" dirty="0">
                 <a:solidFill>
                   <a:srgbClr val="8FD694"/>
                 </a:solidFill>
@@ -7309,9 +7321,9 @@
                 <a:latin typeface="Courier New"/>
                 <a:ea typeface="Courier New"/>
               </a:rPr>
-              <a:t>  .all()</a:t>
-            </a:r>
-            <a:endParaRPr lang="es-AR" sz="1300" b="0" u="none" strike="noStrike">
+              <a:t>();</a:t>
+            </a:r>
+            <a:endParaRPr lang="es-AR" sz="1300" b="0" u="none" strike="noStrike" dirty="0">
               <a:solidFill>
                 <a:srgbClr val="000000"/>
               </a:solidFill>
@@ -21894,7 +21906,7 @@
         </p:nvSpPr>
         <p:spPr>
           <a:xfrm>
-            <a:off x="1005840" y="3035880"/>
+            <a:off x="1005840" y="2959678"/>
             <a:ext cx="4205880" cy="273960"/>
           </a:xfrm>
           <a:prstGeom prst="rect">
@@ -21962,7 +21974,7 @@
         </p:nvSpPr>
         <p:spPr>
           <a:xfrm>
-            <a:off x="1005840" y="3319200"/>
+            <a:off x="1005840" y="3242998"/>
             <a:ext cx="4205880" cy="273960"/>
           </a:xfrm>
           <a:prstGeom prst="rect">
@@ -22030,7 +22042,7 @@
         </p:nvSpPr>
         <p:spPr>
           <a:xfrm>
-            <a:off x="1005840" y="3602880"/>
+            <a:off x="1005840" y="3526678"/>
             <a:ext cx="4205880" cy="273960"/>
           </a:xfrm>
           <a:prstGeom prst="rect">
@@ -22474,7 +22486,7 @@
         </p:nvSpPr>
         <p:spPr>
           <a:xfrm>
-            <a:off x="6949440" y="3035880"/>
+            <a:off x="6949440" y="2959678"/>
             <a:ext cx="4205880" cy="273960"/>
           </a:xfrm>
           <a:prstGeom prst="rect">
@@ -22542,7 +22554,7 @@
         </p:nvSpPr>
         <p:spPr>
           <a:xfrm>
-            <a:off x="6949440" y="3319200"/>
+            <a:off x="6949440" y="3242998"/>
             <a:ext cx="4205880" cy="273960"/>
           </a:xfrm>
           <a:prstGeom prst="rect">
@@ -22610,7 +22622,7 @@
         </p:nvSpPr>
         <p:spPr>
           <a:xfrm>
-            <a:off x="6949440" y="3602880"/>
+            <a:off x="6949440" y="3526678"/>
             <a:ext cx="4205880" cy="273960"/>
           </a:xfrm>
           <a:prstGeom prst="rect">
